--- a/data/templates/prism_plan_template_export.pptx
+++ b/data/templates/prism_plan_template_export.pptx
@@ -5447,6 +5447,140 @@
           </a:prstGeom>
         </p:spPr>
       </p:pic>
+      <p:sp>
+        <p:nvSpPr>
+          <p:cNvPr id="6" name="TextBox 5">
+            <a:extLst>
+              <a:ext uri="{FF2B5EF4-FFF2-40B4-BE49-F238E27FC236}">
+                <a16:creationId xmlns:a16="http://schemas.microsoft.com/office/drawing/2014/main" id="{7E6ABAE3-8951-4D9D-8E83-6EAB3CB2E6E1}"/>
+              </a:ext>
+            </a:extLst>
+          </p:cNvPr>
+          <p:cNvSpPr txBox="1"/>
+          <p:nvPr/>
+        </p:nvSpPr>
+        <p:spPr>
+          <a:xfrm>
+            <a:off x="631075" y="984251"/>
+            <a:ext cx="7881850" cy="2800000"/>
+          </a:xfrm>
+          <a:prstGeom prst="rect">
+            <a:avLst/>
+          </a:prstGeom>
+          <a:noFill/>
+        </p:spPr>
+        <p:txBody>
+          <a:bodyPr wrap="square">
+            <a:spAutoFit/>
+          </a:bodyPr>
+          <a:lstStyle/>
+          <a:p>
+            <a:pPr marL="285750" indent="-285750">
+              <a:buFont typeface="Arial" panose="020B0604020202020204" pitchFamily="34" charset="0"/>
+              <a:buChar char="•"/>
+            </a:pPr>
+            <a:r>
+              <a:rPr lang="en-GB" sz="1000" dirty="0">
+                <a:solidFill>
+                  <a:schemeClr val="bg1"/>
+                </a:solidFill>
+                <a:latin typeface="Barlow"/>
+              </a:rPr>
+              <a:t>Every figure in this deck traces back to one of these sources.</a:t>
+            </a:r>
+          </a:p>
+          <a:p>
+            <a:pPr marL="285750" indent="-285750">
+              <a:buFont typeface="Arial" panose="020B0604020202020204" pitchFamily="34" charset="0"/>
+              <a:buChar char="•"/>
+            </a:pPr>
+            <a:r>
+              <a:rPr lang="en-GB" sz="1000" dirty="0">
+                <a:solidFill>
+                  <a:schemeClr val="bg1"/>
+                </a:solidFill>
+                <a:latin typeface="Barlow"/>
+              </a:rPr>
+              <a:t>[PROVENANCE_1]</a:t>
+            </a:r>
+          </a:p>
+          <a:p>
+            <a:pPr marL="285750" indent="-285750">
+              <a:buFont typeface="Arial" panose="020B0604020202020204" pitchFamily="34" charset="0"/>
+              <a:buChar char="•"/>
+            </a:pPr>
+            <a:r>
+              <a:rPr lang="en-GB" sz="1000" dirty="0">
+                <a:solidFill>
+                  <a:schemeClr val="bg1"/>
+                </a:solidFill>
+                <a:latin typeface="Barlow"/>
+              </a:rPr>
+              <a:t>[PROVENANCE_2]</a:t>
+            </a:r>
+          </a:p>
+          <a:p>
+            <a:pPr marL="285750" indent="-285750">
+              <a:buFont typeface="Arial" panose="020B0604020202020204" pitchFamily="34" charset="0"/>
+              <a:buChar char="•"/>
+            </a:pPr>
+            <a:r>
+              <a:rPr lang="en-GB" sz="1000" dirty="0">
+                <a:solidFill>
+                  <a:schemeClr val="bg1"/>
+                </a:solidFill>
+                <a:latin typeface="Barlow"/>
+              </a:rPr>
+              <a:t>[PROVENANCE_3]</a:t>
+            </a:r>
+          </a:p>
+          <a:p>
+            <a:pPr marL="285750" indent="-285750">
+              <a:buFont typeface="Arial" panose="020B0604020202020204" pitchFamily="34" charset="0"/>
+              <a:buChar char="•"/>
+            </a:pPr>
+            <a:r>
+              <a:rPr lang="en-GB" sz="1000" dirty="0">
+                <a:solidFill>
+                  <a:schemeClr val="bg1"/>
+                </a:solidFill>
+                <a:latin typeface="Barlow"/>
+              </a:rPr>
+              <a:t>[PROVENANCE_4]</a:t>
+            </a:r>
+          </a:p>
+          <a:p>
+            <a:pPr marL="285750" indent="-285750">
+              <a:buFont typeface="Arial" panose="020B0604020202020204" pitchFamily="34" charset="0"/>
+              <a:buChar char="•"/>
+            </a:pPr>
+            <a:r>
+              <a:rPr lang="en-GB" sz="1000" dirty="0">
+                <a:solidFill>
+                  <a:schemeClr val="bg1"/>
+                </a:solidFill>
+                <a:latin typeface="Barlow"/>
+              </a:rPr>
+              <a:t>[PROVENANCE_5]</a:t>
+            </a:r>
+          </a:p>
+          <a:p>
+            <a:pPr marL="285750" indent="-285750">
+              <a:buFont typeface="Arial" panose="020B0604020202020204" pitchFamily="34" charset="0"/>
+              <a:buChar char="•"/>
+            </a:pPr>
+            <a:r>
+              <a:rPr lang="en-GB" sz="1000" dirty="0">
+                <a:solidFill>
+                  <a:schemeClr val="bg1"/>
+                </a:solidFill>
+                <a:latin typeface="Barlow"/>
+              </a:rPr>
+              <a:t>[PROVENANCE_6]</a:t>
+            </a:r>
+          </a:p>
+        </p:txBody>
+      </p:sp>
     </p:spTree>
     <p:extLst>
       <p:ext uri="{BB962C8B-B14F-4D97-AF65-F5344CB8AC3E}">

--- a/data/templates/prism_plan_template_export.pptx
+++ b/data/templates/prism_plan_template_export.pptx
@@ -3968,7 +3968,7 @@
         <p:spPr>
           <a:xfrm>
             <a:off x="320680" y="1300000"/>
-            <a:ext cx="4553324" cy="707886"/>
+            <a:ext cx="4389120" cy="707886"/>
           </a:xfrm>
           <a:prstGeom prst="rect">
             <a:avLst/>
@@ -4062,7 +4062,7 @@
         <p:spPr>
           <a:xfrm>
             <a:off x="320680" y="1962142"/>
-            <a:ext cx="4880494" cy="492443"/>
+            <a:ext cx="4389120" cy="492443"/>
           </a:xfrm>
           <a:prstGeom prst="rect">
             <a:avLst/>
@@ -4109,7 +4109,7 @@
         <p:spPr>
           <a:xfrm>
             <a:off x="4706223" y="1300000"/>
-            <a:ext cx="4251319" cy="707886"/>
+            <a:ext cx="4389120" cy="707886"/>
           </a:xfrm>
           <a:prstGeom prst="rect">
             <a:avLst/>
@@ -4203,7 +4203,7 @@
         <p:spPr>
           <a:xfrm>
             <a:off x="4706223" y="1962142"/>
-            <a:ext cx="4880494" cy="492443"/>
+            <a:ext cx="4389120" cy="492443"/>
           </a:xfrm>
           <a:prstGeom prst="rect">
             <a:avLst/>
@@ -4250,7 +4250,7 @@
         <p:spPr>
           <a:xfrm>
             <a:off x="2607836" y="2867807"/>
-            <a:ext cx="5110035" cy="707886"/>
+            <a:ext cx="4389120" cy="707886"/>
           </a:xfrm>
           <a:prstGeom prst="rect">
             <a:avLst/>
@@ -4344,7 +4344,7 @@
         <p:spPr>
           <a:xfrm>
             <a:off x="2607836" y="3529949"/>
-            <a:ext cx="4880494" cy="492443"/>
+            <a:ext cx="4389120" cy="492443"/>
           </a:xfrm>
           <a:prstGeom prst="rect">
             <a:avLst/>
@@ -4510,7 +4510,7 @@
         <p:spPr>
           <a:xfrm>
             <a:off x="202514" y="1623501"/>
-            <a:ext cx="4545654" cy="646331"/>
+            <a:ext cx="4389120" cy="646331"/>
           </a:xfrm>
           <a:prstGeom prst="rect">
             <a:avLst/>
@@ -4604,7 +4604,7 @@
         <p:spPr>
           <a:xfrm>
             <a:off x="4740369" y="1623501"/>
-            <a:ext cx="4545654" cy="646331"/>
+            <a:ext cx="4389120" cy="646331"/>
           </a:xfrm>
           <a:prstGeom prst="rect">
             <a:avLst/>
@@ -4698,7 +4698,7 @@
         <p:spPr>
           <a:xfrm>
             <a:off x="202513" y="3046948"/>
-            <a:ext cx="4746991" cy="646331"/>
+            <a:ext cx="4389120" cy="646331"/>
           </a:xfrm>
           <a:prstGeom prst="rect">
             <a:avLst/>
@@ -4792,7 +4792,7 @@
         <p:spPr>
           <a:xfrm>
             <a:off x="4740369" y="3046948"/>
-            <a:ext cx="4545654" cy="646331"/>
+            <a:ext cx="4389120" cy="646331"/>
           </a:xfrm>
           <a:prstGeom prst="rect">
             <a:avLst/>
@@ -5042,7 +5042,7 @@
         <p:spPr>
           <a:xfrm>
             <a:off x="320680" y="1300000"/>
-            <a:ext cx="4519767" cy="707886"/>
+            <a:ext cx="4142232" cy="707886"/>
           </a:xfrm>
           <a:prstGeom prst="rect">
             <a:avLst/>
@@ -5089,7 +5089,7 @@
         <p:spPr>
           <a:xfrm>
             <a:off x="320680" y="1962142"/>
-            <a:ext cx="4880494" cy="492443"/>
+            <a:ext cx="3419856" cy="492443"/>
           </a:xfrm>
           <a:prstGeom prst="rect">
             <a:avLst/>
@@ -5136,7 +5136,7 @@
         <p:spPr>
           <a:xfrm>
             <a:off x="4466239" y="1300000"/>
-            <a:ext cx="4519767" cy="707886"/>
+            <a:ext cx="4142232" cy="707886"/>
           </a:xfrm>
           <a:prstGeom prst="rect">
             <a:avLst/>
@@ -5183,7 +5183,7 @@
         <p:spPr>
           <a:xfrm>
             <a:off x="4466239" y="1962142"/>
-            <a:ext cx="4880494" cy="492443"/>
+            <a:ext cx="3419856" cy="492443"/>
           </a:xfrm>
           <a:prstGeom prst="rect">
             <a:avLst/>
@@ -5230,7 +5230,7 @@
         <p:spPr>
           <a:xfrm>
             <a:off x="2348107" y="2867807"/>
-            <a:ext cx="4519767" cy="707886"/>
+            <a:ext cx="4142232" cy="707886"/>
           </a:xfrm>
           <a:prstGeom prst="rect">
             <a:avLst/>
@@ -5277,7 +5277,7 @@
         <p:spPr>
           <a:xfrm>
             <a:off x="2348107" y="3529949"/>
-            <a:ext cx="4880494" cy="492443"/>
+            <a:ext cx="3419856" cy="492443"/>
           </a:xfrm>
           <a:prstGeom prst="rect">
             <a:avLst/>

--- a/data/templates/prism_plan_template_export.pptx
+++ b/data/templates/prism_plan_template_export.pptx
@@ -3968,7 +3968,7 @@
         <p:spPr>
           <a:xfrm>
             <a:off x="320680" y="1300000"/>
-            <a:ext cx="4389120" cy="707886"/>
+            <a:ext cx="4389119" cy="707886"/>
           </a:xfrm>
           <a:prstGeom prst="rect">
             <a:avLst/>
@@ -4062,7 +4062,7 @@
         <p:spPr>
           <a:xfrm>
             <a:off x="320680" y="1962142"/>
-            <a:ext cx="4389120" cy="492443"/>
+            <a:ext cx="4389119" cy="492443"/>
           </a:xfrm>
           <a:prstGeom prst="rect">
             <a:avLst/>
@@ -4109,7 +4109,7 @@
         <p:spPr>
           <a:xfrm>
             <a:off x="4706223" y="1300000"/>
-            <a:ext cx="4389120" cy="707886"/>
+            <a:ext cx="4389119" cy="707886"/>
           </a:xfrm>
           <a:prstGeom prst="rect">
             <a:avLst/>
@@ -4203,7 +4203,7 @@
         <p:spPr>
           <a:xfrm>
             <a:off x="4706223" y="1962142"/>
-            <a:ext cx="4389120" cy="492443"/>
+            <a:ext cx="4389119" cy="492443"/>
           </a:xfrm>
           <a:prstGeom prst="rect">
             <a:avLst/>
@@ -4250,7 +4250,7 @@
         <p:spPr>
           <a:xfrm>
             <a:off x="2607836" y="2867807"/>
-            <a:ext cx="4389120" cy="707886"/>
+            <a:ext cx="4389119" cy="707886"/>
           </a:xfrm>
           <a:prstGeom prst="rect">
             <a:avLst/>
@@ -4344,7 +4344,7 @@
         <p:spPr>
           <a:xfrm>
             <a:off x="2607836" y="3529949"/>
-            <a:ext cx="4389120" cy="492443"/>
+            <a:ext cx="4389119" cy="492443"/>
           </a:xfrm>
           <a:prstGeom prst="rect">
             <a:avLst/>
@@ -4510,7 +4510,7 @@
         <p:spPr>
           <a:xfrm>
             <a:off x="202514" y="1623501"/>
-            <a:ext cx="4389120" cy="646331"/>
+            <a:ext cx="4389119" cy="646331"/>
           </a:xfrm>
           <a:prstGeom prst="rect">
             <a:avLst/>
@@ -4604,7 +4604,7 @@
         <p:spPr>
           <a:xfrm>
             <a:off x="4740369" y="1623501"/>
-            <a:ext cx="4389120" cy="646331"/>
+            <a:ext cx="4389119" cy="646331"/>
           </a:xfrm>
           <a:prstGeom prst="rect">
             <a:avLst/>
@@ -4698,7 +4698,7 @@
         <p:spPr>
           <a:xfrm>
             <a:off x="202513" y="3046948"/>
-            <a:ext cx="4389120" cy="646331"/>
+            <a:ext cx="4389119" cy="646331"/>
           </a:xfrm>
           <a:prstGeom prst="rect">
             <a:avLst/>
@@ -4792,7 +4792,7 @@
         <p:spPr>
           <a:xfrm>
             <a:off x="4740369" y="3046948"/>
-            <a:ext cx="4389120" cy="646331"/>
+            <a:ext cx="4389119" cy="646331"/>
           </a:xfrm>
           <a:prstGeom prst="rect">
             <a:avLst/>
@@ -5042,7 +5042,7 @@
         <p:spPr>
           <a:xfrm>
             <a:off x="320680" y="1300000"/>
-            <a:ext cx="4142232" cy="707886"/>
+            <a:ext cx="4142231" cy="707886"/>
           </a:xfrm>
           <a:prstGeom prst="rect">
             <a:avLst/>
@@ -5136,7 +5136,7 @@
         <p:spPr>
           <a:xfrm>
             <a:off x="4466239" y="1300000"/>
-            <a:ext cx="4142232" cy="707886"/>
+            <a:ext cx="4142231" cy="707886"/>
           </a:xfrm>
           <a:prstGeom prst="rect">
             <a:avLst/>
@@ -5230,7 +5230,7 @@
         <p:spPr>
           <a:xfrm>
             <a:off x="2348107" y="2867807"/>
-            <a:ext cx="4142232" cy="707886"/>
+            <a:ext cx="4142231" cy="707886"/>
           </a:xfrm>
           <a:prstGeom prst="rect">
             <a:avLst/>
